--- a/docs/ISP_Raw_5min.pptx
+++ b/docs/ISP_Raw_5min.pptx
@@ -301,7 +301,7 @@
             <a:pPr algn="r">
               <a:buNone/>
             </a:pPr>
-            <a:fld id="{A00E29C3-8DDF-49B5-986D-DB9C44E9EEB5}" type="slidenum">
+            <a:fld id="{ECD5BF23-095F-4607-974B-A460A06B1EB7}" type="slidenum">
               <a:rPr b="0" lang="en-US" sz="1400" spc="-1" strike="noStrike">
                 <a:latin typeface="Times New Roman"/>
               </a:rPr>
@@ -2629,7 +2629,43 @@
                 </a:solidFill>
                 <a:latin typeface="Microsoft YaHei"/>
               </a:rPr>
-              <a:t>编码；最后 </a:t>
+              <a:t>编码；左边是 </a:t>
+            </a:r>
+            <a:r>
+              <a:rPr b="0" lang="en-US" sz="1300" spc="-1" strike="noStrike">
+                <a:solidFill>
+                  <a:srgbClr val="334155"/>
+                </a:solidFill>
+                <a:latin typeface="Microsoft YaHei"/>
+              </a:rPr>
+              <a:t>CCM </a:t>
+            </a:r>
+            <a:r>
+              <a:rPr b="0" lang="zh-CN" sz="1300" spc="-1" strike="noStrike">
+                <a:solidFill>
+                  <a:srgbClr val="334155"/>
+                </a:solidFill>
+                <a:latin typeface="Microsoft YaHei"/>
+              </a:rPr>
+              <a:t>前，右边是 </a:t>
+            </a:r>
+            <a:r>
+              <a:rPr b="0" lang="en-US" sz="1300" spc="-1" strike="noStrike">
+                <a:solidFill>
+                  <a:srgbClr val="334155"/>
+                </a:solidFill>
+                <a:latin typeface="Microsoft YaHei"/>
+              </a:rPr>
+              <a:t>CCM </a:t>
+            </a:r>
+            <a:r>
+              <a:rPr b="0" lang="zh-CN" sz="1300" spc="-1" strike="noStrike">
+                <a:solidFill>
+                  <a:srgbClr val="334155"/>
+                </a:solidFill>
+                <a:latin typeface="Microsoft YaHei"/>
+              </a:rPr>
+              <a:t>后，白墙被拉回中性；最后 </a:t>
             </a:r>
             <a:r>
               <a:rPr b="0" lang="en-US" sz="1300" spc="-1" strike="noStrike">
@@ -2946,7 +2982,79 @@
                 </a:solidFill>
                 <a:latin typeface="Microsoft YaHei"/>
               </a:rPr>
-              <a:t>各降一半分辨率，人眼几乎看不出来。再改对比度、色相和饱和度；最后缩放裁剪，编码成 </a:t>
+              <a:t>各降一半分辨率，人眼几乎看不出来。左边是 </a:t>
+            </a:r>
+            <a:r>
+              <a:rPr b="0" lang="en-US" sz="1300" spc="-1" strike="noStrike">
+                <a:solidFill>
+                  <a:srgbClr val="334155"/>
+                </a:solidFill>
+                <a:latin typeface="Microsoft YaHei"/>
+              </a:rPr>
+              <a:t>RGB</a:t>
+            </a:r>
+            <a:r>
+              <a:rPr b="0" lang="zh-CN" sz="1300" spc="-1" strike="noStrike">
+                <a:solidFill>
+                  <a:srgbClr val="334155"/>
+                </a:solidFill>
+                <a:latin typeface="Microsoft YaHei"/>
+              </a:rPr>
+              <a:t>，右边是 </a:t>
+            </a:r>
+            <a:r>
+              <a:rPr b="0" lang="en-US" sz="1300" spc="-1" strike="noStrike">
+                <a:solidFill>
+                  <a:srgbClr val="334155"/>
+                </a:solidFill>
+                <a:latin typeface="Microsoft YaHei"/>
+              </a:rPr>
+              <a:t>YUV</a:t>
+            </a:r>
+            <a:r>
+              <a:rPr b="0" lang="zh-CN" sz="1300" spc="-1" strike="noStrike">
+                <a:solidFill>
+                  <a:srgbClr val="334155"/>
+                </a:solidFill>
+                <a:latin typeface="Microsoft YaHei"/>
+              </a:rPr>
+              <a:t>；看起来接近，但后面只改 </a:t>
+            </a:r>
+            <a:r>
+              <a:rPr b="0" lang="en-US" sz="1300" spc="-1" strike="noStrike">
+                <a:solidFill>
+                  <a:srgbClr val="334155"/>
+                </a:solidFill>
+                <a:latin typeface="Microsoft YaHei"/>
+              </a:rPr>
+              <a:t>Y </a:t>
+            </a:r>
+            <a:r>
+              <a:rPr b="0" lang="zh-CN" sz="1300" spc="-1" strike="noStrike">
+                <a:solidFill>
+                  <a:srgbClr val="334155"/>
+                </a:solidFill>
+                <a:latin typeface="Microsoft YaHei"/>
+              </a:rPr>
+              <a:t>和 </a:t>
+            </a:r>
+            <a:r>
+              <a:rPr b="0" lang="en-US" sz="1300" spc="-1" strike="noStrike">
+                <a:solidFill>
+                  <a:srgbClr val="334155"/>
+                </a:solidFill>
+                <a:latin typeface="Microsoft YaHei"/>
+              </a:rPr>
+              <a:t>U/V</a:t>
+            </a:r>
+            <a:r>
+              <a:rPr b="0" lang="zh-CN" sz="1300" spc="-1" strike="noStrike">
+                <a:solidFill>
+                  <a:srgbClr val="334155"/>
+                </a:solidFill>
+                <a:latin typeface="Microsoft YaHei"/>
+              </a:rPr>
+              <a:t>。再改对比度、色相和饱和度；最后缩放裁剪，编码成 </a:t>
             </a:r>
             <a:r>
               <a:rPr b="0" lang="en-US" sz="1300" spc="-1" strike="noStrike">
@@ -3558,7 +3666,7 @@
         <p:txBody>
           <a:bodyPr/>
           <a:p>
-            <a:fld id="{B5A260B4-B7D6-4BE4-9E5E-BACE5319C859}" type="slidenum">
+            <a:fld id="{606CEE99-D2B5-4A06-A9DD-865502332DA8}" type="slidenum">
               <a:t>&lt;#&gt;</a:t>
             </a:fld>
           </a:p>
@@ -3746,7 +3854,7 @@
         <p:txBody>
           <a:bodyPr/>
           <a:p>
-            <a:fld id="{695653CF-7F9A-4DDD-9727-79389B3418FF}" type="slidenum">
+            <a:fld id="{4A30A39D-ECC4-468D-83CC-0292BC1B234C}" type="slidenum">
               <a:t>&lt;#&gt;</a:t>
             </a:fld>
           </a:p>
@@ -4002,7 +4110,7 @@
         <p:txBody>
           <a:bodyPr/>
           <a:p>
-            <a:fld id="{916184F0-65AB-48AC-B2AD-D561C3212BAF}" type="slidenum">
+            <a:fld id="{8B7C5B40-5B44-4D19-97CC-101A648F5653}" type="slidenum">
               <a:t>&lt;#&gt;</a:t>
             </a:fld>
           </a:p>
@@ -4326,7 +4434,7 @@
         <p:txBody>
           <a:bodyPr/>
           <a:p>
-            <a:fld id="{3C4C0E05-01B1-497B-844A-811593BB31FC}" type="slidenum">
+            <a:fld id="{26124F87-585F-4FBF-A9EE-CA747D94FF47}" type="slidenum">
               <a:t>&lt;#&gt;</a:t>
             </a:fld>
           </a:p>
@@ -4483,7 +4591,7 @@
         <p:txBody>
           <a:bodyPr/>
           <a:p>
-            <a:fld id="{1F400E05-21BC-4327-A761-164036CF1F74}" type="slidenum">
+            <a:fld id="{79C7D475-27BC-4350-A22E-4C26F33D21C4}" type="slidenum">
               <a:t>&lt;#&gt;</a:t>
             </a:fld>
           </a:p>
@@ -4637,7 +4745,7 @@
         <p:txBody>
           <a:bodyPr/>
           <a:p>
-            <a:fld id="{F122CDA6-9716-49FD-AB4C-3DAC3F10E4C6}" type="slidenum">
+            <a:fld id="{5FB31F90-E2AF-4BEB-96F2-FF3281C86A43}" type="slidenum">
               <a:t>&lt;#&gt;</a:t>
             </a:fld>
           </a:p>
@@ -4825,7 +4933,7 @@
         <p:txBody>
           <a:bodyPr/>
           <a:p>
-            <a:fld id="{8AFFBBDF-50C3-4FCE-9F63-2948D19EBC0E}" type="slidenum">
+            <a:fld id="{159983C2-7108-4524-924C-7F5A1F76629B}" type="slidenum">
               <a:t>&lt;#&gt;</a:t>
             </a:fld>
           </a:p>
@@ -4945,7 +5053,7 @@
         <p:txBody>
           <a:bodyPr/>
           <a:p>
-            <a:fld id="{C690C485-0D73-4A08-A326-42F8C501AD12}" type="slidenum">
+            <a:fld id="{2B9AD6D1-5D61-42E1-ACBF-AEDA27026FCA}" type="slidenum">
               <a:t>&lt;#&gt;</a:t>
             </a:fld>
           </a:p>
@@ -5065,7 +5173,7 @@
         <p:txBody>
           <a:bodyPr/>
           <a:p>
-            <a:fld id="{FC4CDDCC-2631-494E-8FAD-56E5AFAA6BA9}" type="slidenum">
+            <a:fld id="{E77D211B-354E-40AB-AA8A-A71ADB3C5CB1}" type="slidenum">
               <a:t>&lt;#&gt;</a:t>
             </a:fld>
           </a:p>
@@ -5287,7 +5395,7 @@
         <p:txBody>
           <a:bodyPr/>
           <a:p>
-            <a:fld id="{046786E4-FA55-49AD-84D4-E73670848936}" type="slidenum">
+            <a:fld id="{8E8B72F5-64D3-4BD0-9DFD-E269351147CE}" type="slidenum">
               <a:t>&lt;#&gt;</a:t>
             </a:fld>
           </a:p>
@@ -5509,7 +5617,7 @@
         <p:txBody>
           <a:bodyPr/>
           <a:p>
-            <a:fld id="{49440CB2-24B5-48FC-89EA-0308401AAD47}" type="slidenum">
+            <a:fld id="{2D719879-9E7A-4A3D-ADAD-80704A92759D}" type="slidenum">
               <a:t>&lt;#&gt;</a:t>
             </a:fld>
           </a:p>
@@ -5731,7 +5839,7 @@
         <p:txBody>
           <a:bodyPr/>
           <a:p>
-            <a:fld id="{2AF99C7B-ED54-4F33-8A17-F190730391EE}" type="slidenum">
+            <a:fld id="{EBBACF83-2A47-413C-AB9F-BAEABDD5CA6D}" type="slidenum">
               <a:t>&lt;#&gt;</a:t>
             </a:fld>
           </a:p>
@@ -6143,7 +6251,7 @@
             <a:pPr algn="r">
               <a:buNone/>
             </a:pPr>
-            <a:fld id="{AC6C7CFB-B0E5-4DCA-B46E-EF2501E61F8D}" type="slidenum">
+            <a:fld id="{B3A50A83-8F4B-4E9D-A46C-2D38DB35A4C0}" type="slidenum">
               <a:rPr b="0" lang="en-US" sz="1400" spc="-1" strike="noStrike">
                 <a:latin typeface="Times New Roman"/>
               </a:rPr>
@@ -11284,8 +11392,8 @@
         </p:nvSpPr>
         <p:spPr>
           <a:xfrm>
-            <a:off x="1357560" y="1380600"/>
-            <a:ext cx="4325040" cy="2907720"/>
+            <a:off x="649080" y="1467000"/>
+            <a:ext cx="5742360" cy="2414880"/>
           </a:xfrm>
           <a:prstGeom prst="rect">
             <a:avLst/>
@@ -11313,8 +11421,8 @@
         </p:blipFill>
         <p:spPr>
           <a:xfrm>
-            <a:off x="1394280" y="1417320"/>
-            <a:ext cx="4251960" cy="2834640"/>
+            <a:off x="685800" y="1503360"/>
+            <a:ext cx="5669280" cy="2341800"/>
           </a:xfrm>
           <a:prstGeom prst="rect">
             <a:avLst/>
@@ -11332,7 +11440,7 @@
         </p:nvSpPr>
         <p:spPr>
           <a:xfrm>
-            <a:off x="685800" y="4370760"/>
+            <a:off x="685800" y="4114800"/>
             <a:ext cx="5669280" cy="192600"/>
           </a:xfrm>
           <a:prstGeom prst="rect">
@@ -11367,7 +11475,7 @@
                 </a:solidFill>
                 <a:latin typeface="Microsoft YaHei"/>
               </a:rPr>
-              <a:t>后：</a:t>
+              <a:t>前（左） </a:t>
             </a:r>
             <a:r>
               <a:rPr b="0" lang="en-US" sz="1050" spc="-1" strike="noStrike">
@@ -11376,7 +11484,16 @@
                 </a:solidFill>
                 <a:latin typeface="Microsoft YaHei"/>
               </a:rPr>
-              <a:t>linear sRGB</a:t>
+              <a:t>vs CCM </a:t>
+            </a:r>
+            <a:r>
+              <a:rPr b="0" lang="zh-CN" sz="1050" spc="-1" strike="noStrike">
+                <a:solidFill>
+                  <a:srgbClr val="64748b"/>
+                </a:solidFill>
+                <a:latin typeface="Microsoft YaHei"/>
+              </a:rPr>
+              <a:t>后（右）</a:t>
             </a:r>
             <a:endParaRPr b="0" lang="en-US" sz="1050" spc="-1" strike="noStrike">
               <a:solidFill>
@@ -12574,8 +12691,8 @@
         </p:nvSpPr>
         <p:spPr>
           <a:xfrm>
-            <a:off x="1357560" y="1380600"/>
-            <a:ext cx="4325040" cy="2907720"/>
+            <a:off x="649080" y="1467000"/>
+            <a:ext cx="5742360" cy="2414880"/>
           </a:xfrm>
           <a:prstGeom prst="rect">
             <a:avLst/>
@@ -12603,8 +12720,8 @@
         </p:blipFill>
         <p:spPr>
           <a:xfrm>
-            <a:off x="1394280" y="1417320"/>
-            <a:ext cx="4251960" cy="2834640"/>
+            <a:off x="685800" y="1503360"/>
+            <a:ext cx="5669280" cy="2341800"/>
           </a:xfrm>
           <a:prstGeom prst="rect">
             <a:avLst/>

--- a/docs/ISP_Raw_5min.pptx
+++ b/docs/ISP_Raw_5min.pptx
@@ -301,7 +301,7 @@
             <a:pPr algn="r">
               <a:buNone/>
             </a:pPr>
-            <a:fld id="{ECD5BF23-095F-4607-974B-A460A06B1EB7}" type="slidenum">
+            <a:fld id="{A7FB3C80-7CF2-452E-B8FF-28FB31DF3B11}" type="slidenum">
               <a:rPr b="0" lang="en-US" sz="1400" spc="-1" strike="noStrike">
                 <a:latin typeface="Times New Roman"/>
               </a:rPr>
@@ -3666,7 +3666,7 @@
         <p:txBody>
           <a:bodyPr/>
           <a:p>
-            <a:fld id="{606CEE99-D2B5-4A06-A9DD-865502332DA8}" type="slidenum">
+            <a:fld id="{8FAF8499-FD70-45BE-BF0D-7F9B61A16478}" type="slidenum">
               <a:t>&lt;#&gt;</a:t>
             </a:fld>
           </a:p>
@@ -3854,7 +3854,7 @@
         <p:txBody>
           <a:bodyPr/>
           <a:p>
-            <a:fld id="{4A30A39D-ECC4-468D-83CC-0292BC1B234C}" type="slidenum">
+            <a:fld id="{5154ADF2-7F83-4623-862E-402E6666AD15}" type="slidenum">
               <a:t>&lt;#&gt;</a:t>
             </a:fld>
           </a:p>
@@ -4110,7 +4110,7 @@
         <p:txBody>
           <a:bodyPr/>
           <a:p>
-            <a:fld id="{8B7C5B40-5B44-4D19-97CC-101A648F5653}" type="slidenum">
+            <a:fld id="{1BE78BA6-760D-450F-92D4-481310541FAF}" type="slidenum">
               <a:t>&lt;#&gt;</a:t>
             </a:fld>
           </a:p>
@@ -4434,7 +4434,7 @@
         <p:txBody>
           <a:bodyPr/>
           <a:p>
-            <a:fld id="{26124F87-585F-4FBF-A9EE-CA747D94FF47}" type="slidenum">
+            <a:fld id="{32361C21-5CDD-4610-A47B-841BD3B772AA}" type="slidenum">
               <a:t>&lt;#&gt;</a:t>
             </a:fld>
           </a:p>
@@ -4591,7 +4591,7 @@
         <p:txBody>
           <a:bodyPr/>
           <a:p>
-            <a:fld id="{79C7D475-27BC-4350-A22E-4C26F33D21C4}" type="slidenum">
+            <a:fld id="{DE1A427F-D855-4DB6-9C37-0D7E0E5CBF3D}" type="slidenum">
               <a:t>&lt;#&gt;</a:t>
             </a:fld>
           </a:p>
@@ -4745,7 +4745,7 @@
         <p:txBody>
           <a:bodyPr/>
           <a:p>
-            <a:fld id="{5FB31F90-E2AF-4BEB-96F2-FF3281C86A43}" type="slidenum">
+            <a:fld id="{EE121000-FE5C-48BC-845D-E5C17B55E7B0}" type="slidenum">
               <a:t>&lt;#&gt;</a:t>
             </a:fld>
           </a:p>
@@ -4933,7 +4933,7 @@
         <p:txBody>
           <a:bodyPr/>
           <a:p>
-            <a:fld id="{159983C2-7108-4524-924C-7F5A1F76629B}" type="slidenum">
+            <a:fld id="{7E10A45D-DA40-4DCD-B64D-5F27B3AF636B}" type="slidenum">
               <a:t>&lt;#&gt;</a:t>
             </a:fld>
           </a:p>
@@ -5053,7 +5053,7 @@
         <p:txBody>
           <a:bodyPr/>
           <a:p>
-            <a:fld id="{2B9AD6D1-5D61-42E1-ACBF-AEDA27026FCA}" type="slidenum">
+            <a:fld id="{8EC9DC02-572C-43F8-BD43-92A8755BC419}" type="slidenum">
               <a:t>&lt;#&gt;</a:t>
             </a:fld>
           </a:p>
@@ -5173,7 +5173,7 @@
         <p:txBody>
           <a:bodyPr/>
           <a:p>
-            <a:fld id="{E77D211B-354E-40AB-AA8A-A71ADB3C5CB1}" type="slidenum">
+            <a:fld id="{EC9A5941-B359-4287-A2F3-595694B2EBA1}" type="slidenum">
               <a:t>&lt;#&gt;</a:t>
             </a:fld>
           </a:p>
@@ -5395,7 +5395,7 @@
         <p:txBody>
           <a:bodyPr/>
           <a:p>
-            <a:fld id="{8E8B72F5-64D3-4BD0-9DFD-E269351147CE}" type="slidenum">
+            <a:fld id="{5556AB31-CE3A-4BFF-8D58-C631C72453DC}" type="slidenum">
               <a:t>&lt;#&gt;</a:t>
             </a:fld>
           </a:p>
@@ -5617,7 +5617,7 @@
         <p:txBody>
           <a:bodyPr/>
           <a:p>
-            <a:fld id="{2D719879-9E7A-4A3D-ADAD-80704A92759D}" type="slidenum">
+            <a:fld id="{242A51B9-4C8C-4A6C-80E1-F7D6F189D59E}" type="slidenum">
               <a:t>&lt;#&gt;</a:t>
             </a:fld>
           </a:p>
@@ -5839,7 +5839,7 @@
         <p:txBody>
           <a:bodyPr/>
           <a:p>
-            <a:fld id="{EBBACF83-2A47-413C-AB9F-BAEABDD5CA6D}" type="slidenum">
+            <a:fld id="{C7B24538-A61A-42DA-96A4-BC65BA46B132}" type="slidenum">
               <a:t>&lt;#&gt;</a:t>
             </a:fld>
           </a:p>
@@ -6251,7 +6251,7 @@
             <a:pPr algn="r">
               <a:buNone/>
             </a:pPr>
-            <a:fld id="{B3A50A83-8F4B-4E9D-A46C-2D38DB35A4C0}" type="slidenum">
+            <a:fld id="{8C318181-EED6-40C6-8469-DFAD45B6310C}" type="slidenum">
               <a:rPr b="0" lang="en-US" sz="1400" spc="-1" strike="noStrike">
                 <a:latin typeface="Times New Roman"/>
               </a:rPr>
